--- a/docs/sunum/dernek/apya-sunum-dernek.pptx
+++ b/docs/sunum/dernek/apya-sunum-dernek.pptx
@@ -608,7 +608,7 @@
               <a:rPr lang="en-US" dirty="0"/>
               <a:t>Rapor için kimseden veri istemezsiniz
 Günlük çalışırken girilen kayıtlar raporu zaten oluşturur.
-Her rapor Excel veya PDF olarak indirilir; tarih aralığı, proje ve kurum filtreleri hazır gelir.</a:t>
+Proje bütçesi raporu Excel veya PDF olarak iner; fon raporunu derleyici belgeler ve harcamalardan derler, teslim tarihi ve alıcısıyla kayda geçer.</a:t>
             </a:r>
             <a:endParaRPr lang="en-US" dirty="0"/>
           </a:p>
@@ -697,8 +697,8 @@
             <a:r>
               <a:rPr lang="en-US" dirty="0"/>
               <a:t>Size uygun fonu kaçırmayın
-Açık çağrılar tek listede; derneğinizin profiline uyanlar öne çıkar.
-Kazanılan fon normal bir projeye dönüşür — bütçesi, faaliyetleri ve harcama belgeleriyle aynı sistemde yürür.</a:t>
+Uyan çağrılar öne çıkar; başvuruyu danışmanınızla birlikte hazırlarsınız.
+Bugün ekranı sıradaki işi risk ve tutara göre sıralar; Hibe Yolculuğum bütün süreçleri çağrı başına tek satırda gösterir. Kazanılan fon normal bir projeye dönüşür — bütçesi, faaliyetleri ve belgeleriyle aynı sistemde yürür.</a:t>
             </a:r>
             <a:endParaRPr lang="en-US" dirty="0"/>
           </a:p>
@@ -878,7 +878,7 @@
               <a:rPr lang="en-US" dirty="0"/>
               <a:t>Şubeniz kendi kapalı alanında
 Genel merkez, şube ve temsilcilikleri tek platformda, birbirine karıştırmadan yönetirsiniz.
-Her değişiklik kim ve ne zaman bilgisiyle kayda geçer; bağışçıya ve denetime karşı hesap verirken dayanağınız olur.</a:t>
+Her değişiklik kim ve ne zaman bilgisiyle kayda geçer; fatura ve pano çıktılarında derneğinizin resmî unvanı yer alır — bağışçıya ve denetime karşı hesap verirken dayanağınız olur.</a:t>
             </a:r>
             <a:endParaRPr lang="en-US" dirty="0"/>
           </a:p>
@@ -1417,7 +1417,7 @@
               <a:rPr lang="en-US" dirty="0"/>
               <a:t>Sabah açtığınızda gördüğünüz ekran
 Gününüze nereden başlayacağınızı söyleyen tek sayfa.
-Her rakam tıklanabilir: “7 onay bekleyen harcama” yazısına bastığınızda o harcamaların listesine inersiniz.</a:t>
+Görünüm role göre gelir: Proje Yönetimi, Finans, Bugün, Hibe takibi. Kart ekler, çıkarır, sürükleyip boyutlandırırsınız; her rakam tıklanınca ilgili listeye iner, sayfa tek tıkla yazdırılır.</a:t>
             </a:r>
             <a:endParaRPr lang="en-US" dirty="0"/>
           </a:p>
@@ -1507,7 +1507,7 @@
               <a:rPr lang="en-US" dirty="0"/>
               <a:t>Her fonun kendi konsolu var
 Faaliyetin durumu ve fonun parası aynı ekranda, yan yana.
-Fonun ne kadarı kaldı diye tahmin etmezsiniz: harcanan tutar faaliyetlerden, bütçe ise fon tanımından gelir; ikisi aynı satırda görünür.</a:t>
+Fonun ne kadarı kaldı diye tahmin etmezsiniz: harcama görevin içinden bütçe kalemine bağlı girilir, bütçe rakamı her ekranda aynıdır. Projeden finans ve belge ekranlarına tek tıkla geçilir.</a:t>
             </a:r>
             <a:endParaRPr lang="en-US" dirty="0"/>
           </a:p>
@@ -1597,7 +1597,7 @@
               <a:rPr lang="en-US" dirty="0"/>
               <a:t>Aynı faaliyetler, dört farklı bakış
 Veri tek; herkes kendine uygun görünümü seçer.
-Kanban'da bir kartı sürüklediğinizde liste, takvim ve Gantt aynı anda değişir — çünkü hepsi aynı faaliyeti gösterir.</a:t>
+Kart Panosu'nda bir kartı sürüklediğinizde liste, takvim ve zaman çizelgesi aynı anda değişir — çünkü hepsi aynı faaliyeti gösterir. Bir görev ekip dışından birine de açılabilir; ekip içi yazışma dışarı çıkmaz.</a:t>
             </a:r>
             <a:endParaRPr lang="en-US" dirty="0"/>
           </a:p>
@@ -1687,7 +1687,7 @@
               <a:rPr lang="en-US" dirty="0"/>
               <a:t>Para nereden geldi, nereye gitti
 Muhasebe bilgisi gerektirmeden, doğru kayıt otomatik oluşur.
-Siz sadece “bağış geldi” veya “şu gideri ödedim” dersiniz; kasa, proje maliyeti ve bağışçı kaydı arkada kendiliğinden işlenir. Yabancı para cinsinden fonlarda kur TCMB'den otomatik çekilir.</a:t>
+Siz sadece “bağış geldi” veya “şu gideri ödedim” dersiniz; kasa, bütçe kalemi ve dilim arkada kendiliğinden işlenir. Kesintiyi kalemlere dağıtıp yeni bütçe revizyonu üretirsiniz; döviz bütçeli fonda kur TCMB'den otomatik çekilir, üç rakam birden görünür.</a:t>
             </a:r>
             <a:endParaRPr lang="en-US" dirty="0"/>
           </a:p>
@@ -1776,8 +1776,8 @@
             <a:r>
               <a:rPr lang="en-US" dirty="0"/>
               <a:t>Denetime hazır durun
-Her belge ait olduğu projeye ve faaliyete bağlı durur.
-Aynı belgenin yeni sürümünü yüklediğinizde eskisi silinmez, arşive iner. “Fon sözleşmesinin son hali hangisi?” sorusu ortadan kalkar.</a:t>
+Her belge projesine bağlı durur; süreç şeridi sırada ne olduğunu söyler.
+Aynı belgenin yeni sürümünü yüklediğinizde eskisi silinmez, arşive iner. Belge açığı finans ekranında da görünür; “Fon sözleşmesinin son hali hangisi?” sorusu ortadan kalkar.</a:t>
             </a:r>
             <a:endParaRPr lang="en-US" dirty="0"/>
           </a:p>
@@ -2152,7 +2152,7 @@
       </p:grpSpPr>
       <p:pic>
         <p:nvPicPr>
-          <p:cNvPr id="2" name="Image 0" descr="E:\Developer\GİT\hitprot-platform\.claude\worktrees\dernek-sunumu\docs\sunum\dernek\gorseller\slayt-01.png">    </p:cNvPr>
+          <p:cNvPr id="2" name="Image 0" descr="/home/claude/sunum/docs/sunum/dernek/gorseller/slayt-01.png">    </p:cNvPr>
           <p:cNvPicPr>
             <a:picLocks noChangeAspect="1"/>
           </p:cNvPicPr>
@@ -2208,7 +2208,7 @@
       </p:grpSpPr>
       <p:pic>
         <p:nvPicPr>
-          <p:cNvPr id="2" name="Image 0" descr="E:\Developer\GİT\hitprot-platform\.claude\worktrees\dernek-sunumu\docs\sunum\dernek\gorseller\slayt-10.png">    </p:cNvPr>
+          <p:cNvPr id="2" name="Image 0" descr="/home/claude/sunum/docs/sunum/dernek/gorseller/slayt-10.png">    </p:cNvPr>
           <p:cNvPicPr>
             <a:picLocks noChangeAspect="1"/>
           </p:cNvPicPr>
@@ -2264,7 +2264,7 @@
       </p:grpSpPr>
       <p:pic>
         <p:nvPicPr>
-          <p:cNvPr id="2" name="Image 0" descr="E:\Developer\GİT\hitprot-platform\.claude\worktrees\dernek-sunumu\docs\sunum\dernek\gorseller\slayt-11.png">    </p:cNvPr>
+          <p:cNvPr id="2" name="Image 0" descr="/home/claude/sunum/docs/sunum/dernek/gorseller/slayt-11.png">    </p:cNvPr>
           <p:cNvPicPr>
             <a:picLocks noChangeAspect="1"/>
           </p:cNvPicPr>
@@ -2320,7 +2320,7 @@
       </p:grpSpPr>
       <p:pic>
         <p:nvPicPr>
-          <p:cNvPr id="2" name="Image 0" descr="E:\Developer\GİT\hitprot-platform\.claude\worktrees\dernek-sunumu\docs\sunum\dernek\gorseller\slayt-12.png">    </p:cNvPr>
+          <p:cNvPr id="2" name="Image 0" descr="/home/claude/sunum/docs/sunum/dernek/gorseller/slayt-12.png">    </p:cNvPr>
           <p:cNvPicPr>
             <a:picLocks noChangeAspect="1"/>
           </p:cNvPicPr>
@@ -2376,7 +2376,7 @@
       </p:grpSpPr>
       <p:pic>
         <p:nvPicPr>
-          <p:cNvPr id="2" name="Image 0" descr="E:\Developer\GİT\hitprot-platform\.claude\worktrees\dernek-sunumu\docs\sunum\dernek\gorseller\slayt-13.png">    </p:cNvPr>
+          <p:cNvPr id="2" name="Image 0" descr="/home/claude/sunum/docs/sunum/dernek/gorseller/slayt-13.png">    </p:cNvPr>
           <p:cNvPicPr>
             <a:picLocks noChangeAspect="1"/>
           </p:cNvPicPr>
@@ -2432,7 +2432,7 @@
       </p:grpSpPr>
       <p:pic>
         <p:nvPicPr>
-          <p:cNvPr id="2" name="Image 0" descr="E:\Developer\GİT\hitprot-platform\.claude\worktrees\dernek-sunumu\docs\sunum\dernek\gorseller\slayt-14.png">    </p:cNvPr>
+          <p:cNvPr id="2" name="Image 0" descr="/home/claude/sunum/docs/sunum/dernek/gorseller/slayt-14.png">    </p:cNvPr>
           <p:cNvPicPr>
             <a:picLocks noChangeAspect="1"/>
           </p:cNvPicPr>
@@ -2488,7 +2488,7 @@
       </p:grpSpPr>
       <p:pic>
         <p:nvPicPr>
-          <p:cNvPr id="2" name="Image 0" descr="E:\Developer\GİT\hitprot-platform\.claude\worktrees\dernek-sunumu\docs\sunum\dernek\gorseller\slayt-15.png">    </p:cNvPr>
+          <p:cNvPr id="2" name="Image 0" descr="/home/claude/sunum/docs/sunum/dernek/gorseller/slayt-15.png">    </p:cNvPr>
           <p:cNvPicPr>
             <a:picLocks noChangeAspect="1"/>
           </p:cNvPicPr>
@@ -2544,7 +2544,7 @@
       </p:grpSpPr>
       <p:pic>
         <p:nvPicPr>
-          <p:cNvPr id="2" name="Image 0" descr="E:\Developer\GİT\hitprot-platform\.claude\worktrees\dernek-sunumu\docs\sunum\dernek\gorseller\slayt-02.png">    </p:cNvPr>
+          <p:cNvPr id="2" name="Image 0" descr="/home/claude/sunum/docs/sunum/dernek/gorseller/slayt-02.png">    </p:cNvPr>
           <p:cNvPicPr>
             <a:picLocks noChangeAspect="1"/>
           </p:cNvPicPr>
@@ -2600,7 +2600,7 @@
       </p:grpSpPr>
       <p:pic>
         <p:nvPicPr>
-          <p:cNvPr id="2" name="Image 0" descr="E:\Developer\GİT\hitprot-platform\.claude\worktrees\dernek-sunumu\docs\sunum\dernek\gorseller\slayt-03.png">    </p:cNvPr>
+          <p:cNvPr id="2" name="Image 0" descr="/home/claude/sunum/docs/sunum/dernek/gorseller/slayt-03.png">    </p:cNvPr>
           <p:cNvPicPr>
             <a:picLocks noChangeAspect="1"/>
           </p:cNvPicPr>
@@ -2656,7 +2656,7 @@
       </p:grpSpPr>
       <p:pic>
         <p:nvPicPr>
-          <p:cNvPr id="2" name="Image 0" descr="E:\Developer\GİT\hitprot-platform\.claude\worktrees\dernek-sunumu\docs\sunum\dernek\gorseller\slayt-04.png">    </p:cNvPr>
+          <p:cNvPr id="2" name="Image 0" descr="/home/claude/sunum/docs/sunum/dernek/gorseller/slayt-04.png">    </p:cNvPr>
           <p:cNvPicPr>
             <a:picLocks noChangeAspect="1"/>
           </p:cNvPicPr>
@@ -2712,7 +2712,7 @@
       </p:grpSpPr>
       <p:pic>
         <p:nvPicPr>
-          <p:cNvPr id="2" name="Image 0" descr="E:\Developer\GİT\hitprot-platform\.claude\worktrees\dernek-sunumu\docs\sunum\dernek\gorseller\slayt-05.png">    </p:cNvPr>
+          <p:cNvPr id="2" name="Image 0" descr="/home/claude/sunum/docs/sunum/dernek/gorseller/slayt-05.png">    </p:cNvPr>
           <p:cNvPicPr>
             <a:picLocks noChangeAspect="1"/>
           </p:cNvPicPr>
@@ -2768,7 +2768,7 @@
       </p:grpSpPr>
       <p:pic>
         <p:nvPicPr>
-          <p:cNvPr id="2" name="Image 0" descr="E:\Developer\GİT\hitprot-platform\.claude\worktrees\dernek-sunumu\docs\sunum\dernek\gorseller\slayt-06.png">    </p:cNvPr>
+          <p:cNvPr id="2" name="Image 0" descr="/home/claude/sunum/docs/sunum/dernek/gorseller/slayt-06.png">    </p:cNvPr>
           <p:cNvPicPr>
             <a:picLocks noChangeAspect="1"/>
           </p:cNvPicPr>
@@ -2824,7 +2824,7 @@
       </p:grpSpPr>
       <p:pic>
         <p:nvPicPr>
-          <p:cNvPr id="2" name="Image 0" descr="E:\Developer\GİT\hitprot-platform\.claude\worktrees\dernek-sunumu\docs\sunum\dernek\gorseller\slayt-07.png">    </p:cNvPr>
+          <p:cNvPr id="2" name="Image 0" descr="/home/claude/sunum/docs/sunum/dernek/gorseller/slayt-07.png">    </p:cNvPr>
           <p:cNvPicPr>
             <a:picLocks noChangeAspect="1"/>
           </p:cNvPicPr>
@@ -2880,7 +2880,7 @@
       </p:grpSpPr>
       <p:pic>
         <p:nvPicPr>
-          <p:cNvPr id="2" name="Image 0" descr="E:\Developer\GİT\hitprot-platform\.claude\worktrees\dernek-sunumu\docs\sunum\dernek\gorseller\slayt-08.png">    </p:cNvPr>
+          <p:cNvPr id="2" name="Image 0" descr="/home/claude/sunum/docs/sunum/dernek/gorseller/slayt-08.png">    </p:cNvPr>
           <p:cNvPicPr>
             <a:picLocks noChangeAspect="1"/>
           </p:cNvPicPr>
@@ -2936,7 +2936,7 @@
       </p:grpSpPr>
       <p:pic>
         <p:nvPicPr>
-          <p:cNvPr id="2" name="Image 0" descr="E:\Developer\GİT\hitprot-platform\.claude\worktrees\dernek-sunumu\docs\sunum\dernek\gorseller\slayt-09.png">    </p:cNvPr>
+          <p:cNvPr id="2" name="Image 0" descr="/home/claude/sunum/docs/sunum/dernek/gorseller/slayt-09.png">    </p:cNvPr>
           <p:cNvPicPr>
             <a:picLocks noChangeAspect="1"/>
           </p:cNvPicPr>
